--- a/3.4 Hoofdstuk 4 - Internationale markten/3.4.1 Paragraaf 1 - Internationale handel/2. Leren/3.4.1 Internationale handel – presentatie.pptx
+++ b/3.4 Hoofdstuk 4 - Internationale markten/3.4.1 Paragraaf 1 - Internationale handel/2. Leren/3.4.1 Internationale handel – presentatie.pptx
@@ -1968,6 +1968,8 @@
               </a:rPr>
               <a:t>Uitleggen waarom kleine landen relatief meer handelen</a:t>
             </a:r>
+          </a:p>
+          <a:p>
             <a:pPr algn="l" marL="342900" indent="-342900">
               <a:lnSpc>
                 <a:spcPct val="150000"/>
@@ -1989,6 +1991,8 @@
               </a:rPr>
               <a:t>Vijf factoren voor handelsstromen benoemen en toelichten</a:t>
             </a:r>
+          </a:p>
+          <a:p>
             <a:pPr algn="l" marL="342900" indent="-342900">
               <a:lnSpc>
                 <a:spcPct val="150000"/>
@@ -2010,6 +2014,8 @@
               </a:rPr>
               <a:t>Het verschil tussen omzet en vrachtwaarde verklaren</a:t>
             </a:r>
+          </a:p>
+          <a:p>
             <a:pPr algn="l" marL="342900" indent="-342900">
               <a:lnSpc>
                 <a:spcPct val="150000"/>
@@ -2031,6 +2037,8 @@
               </a:rPr>
               <a:t>Effecten van arbeidsmigratie op loon en werkgelegenheid beschrijven</a:t>
             </a:r>
+          </a:p>
+          <a:p>
             <a:pPr algn="l" marL="342900" indent="-342900">
               <a:lnSpc>
                 <a:spcPct val="150000"/>
@@ -2052,7 +2060,6 @@
               </a:rPr>
               <a:t>De graviteitsvergelijking toepassen op bilaterale handel</a:t>
             </a:r>
-            <a:endParaRPr lang="en-US" sz="1500" dirty="0"/>
           </a:p>
         </p:txBody>
       </p:sp>
@@ -2153,6 +2160,10 @@
             </a:outerShdw>
           </a:effectLst>
         </p:spPr>
+        <p:txBody>
+          <a:bodyPr/>
+          <a:p/>
+        </p:txBody>
       </p:sp>
       <p:sp>
         <p:nvSpPr>
@@ -2265,6 +2276,10 @@
             </a:outerShdw>
           </a:effectLst>
         </p:spPr>
+        <p:txBody>
+          <a:bodyPr/>
+          <a:p/>
+        </p:txBody>
       </p:sp>
       <p:sp>
         <p:nvSpPr>
@@ -2377,6 +2392,10 @@
             </a:outerShdw>
           </a:effectLst>
         </p:spPr>
+        <p:txBody>
+          <a:bodyPr/>
+          <a:p/>
+        </p:txBody>
       </p:sp>
       <p:sp>
         <p:nvSpPr>
@@ -2489,6 +2508,10 @@
             </a:outerShdw>
           </a:effectLst>
         </p:spPr>
+        <p:txBody>
+          <a:bodyPr/>
+          <a:p/>
+        </p:txBody>
       </p:sp>
       <p:sp>
         <p:nvSpPr>
@@ -2660,6 +2683,10 @@
             </a:outerShdw>
           </a:effectLst>
         </p:spPr>
+        <p:txBody>
+          <a:bodyPr/>
+          <a:p/>
+        </p:txBody>
       </p:sp>
       <p:sp>
         <p:nvSpPr>
@@ -2680,6 +2707,10 @@
           </a:solidFill>
           <a:ln/>
         </p:spPr>
+        <p:txBody>
+          <a:bodyPr/>
+          <a:p/>
+        </p:txBody>
       </p:sp>
       <p:sp>
         <p:nvSpPr>
@@ -2790,6 +2821,10 @@
             </a:outerShdw>
           </a:effectLst>
         </p:spPr>
+        <p:txBody>
+          <a:bodyPr/>
+          <a:p/>
+        </p:txBody>
       </p:sp>
       <p:sp>
         <p:nvSpPr>
@@ -2810,6 +2845,10 @@
           </a:solidFill>
           <a:ln/>
         </p:spPr>
+        <p:txBody>
+          <a:bodyPr/>
+          <a:p/>
+        </p:txBody>
       </p:sp>
       <p:sp>
         <p:nvSpPr>
@@ -2920,6 +2959,10 @@
             </a:outerShdw>
           </a:effectLst>
         </p:spPr>
+        <p:txBody>
+          <a:bodyPr/>
+          <a:p/>
+        </p:txBody>
       </p:sp>
       <p:sp>
         <p:nvSpPr>
@@ -2940,6 +2983,10 @@
           </a:solidFill>
           <a:ln/>
         </p:spPr>
+        <p:txBody>
+          <a:bodyPr/>
+          <a:p/>
+        </p:txBody>
       </p:sp>
       <p:sp>
         <p:nvSpPr>
@@ -3050,6 +3097,10 @@
             </a:outerShdw>
           </a:effectLst>
         </p:spPr>
+        <p:txBody>
+          <a:bodyPr/>
+          <a:p/>
+        </p:txBody>
       </p:sp>
       <p:sp>
         <p:nvSpPr>
@@ -3070,6 +3121,10 @@
           </a:solidFill>
           <a:ln/>
         </p:spPr>
+        <p:txBody>
+          <a:bodyPr/>
+          <a:p/>
+        </p:txBody>
       </p:sp>
       <p:sp>
         <p:nvSpPr>
@@ -3180,6 +3235,10 @@
             </a:outerShdw>
           </a:effectLst>
         </p:spPr>
+        <p:txBody>
+          <a:bodyPr/>
+          <a:p/>
+        </p:txBody>
       </p:sp>
       <p:sp>
         <p:nvSpPr>
@@ -3200,6 +3259,10 @@
           </a:solidFill>
           <a:ln/>
         </p:spPr>
+        <p:txBody>
+          <a:bodyPr/>
+          <a:p/>
+        </p:txBody>
       </p:sp>
       <p:sp>
         <p:nvSpPr>
@@ -3310,6 +3373,10 @@
             </a:outerShdw>
           </a:effectLst>
         </p:spPr>
+        <p:txBody>
+          <a:bodyPr/>
+          <a:p/>
+        </p:txBody>
       </p:sp>
       <p:sp>
         <p:nvSpPr>
@@ -3330,6 +3397,10 @@
           </a:solidFill>
           <a:ln/>
         </p:spPr>
+        <p:txBody>
+          <a:bodyPr/>
+          <a:p/>
+        </p:txBody>
       </p:sp>
       <p:sp>
         <p:nvSpPr>
@@ -3501,6 +3572,10 @@
             </a:outerShdw>
           </a:effectLst>
         </p:spPr>
+        <p:txBody>
+          <a:bodyPr/>
+          <a:p/>
+        </p:txBody>
       </p:sp>
       <p:sp>
         <p:nvSpPr>
@@ -3521,6 +3596,10 @@
           </a:solidFill>
           <a:ln/>
         </p:spPr>
+        <p:txBody>
+          <a:bodyPr/>
+          <a:p/>
+        </p:txBody>
       </p:sp>
       <p:sp>
         <p:nvSpPr>
@@ -3751,6 +3830,10 @@
             </a:outerShdw>
           </a:effectLst>
         </p:spPr>
+        <p:txBody>
+          <a:bodyPr/>
+          <a:p/>
+        </p:txBody>
       </p:sp>
       <p:sp>
         <p:nvSpPr>
@@ -3771,6 +3854,10 @@
           </a:solidFill>
           <a:ln/>
         </p:spPr>
+        <p:txBody>
+          <a:bodyPr/>
+          <a:p/>
+        </p:txBody>
       </p:sp>
       <p:sp>
         <p:nvSpPr>
@@ -3974,6 +4061,10 @@
           </a:solidFill>
           <a:ln/>
         </p:spPr>
+        <p:txBody>
+          <a:bodyPr/>
+          <a:p/>
+        </p:txBody>
       </p:sp>
       <p:sp>
         <p:nvSpPr>
@@ -3994,6 +4085,10 @@
           </a:solidFill>
           <a:ln/>
         </p:spPr>
+        <p:txBody>
+          <a:bodyPr/>
+          <a:p/>
+        </p:txBody>
       </p:sp>
       <p:sp>
         <p:nvSpPr>
@@ -4145,6 +4240,10 @@
             </a:outerShdw>
           </a:effectLst>
         </p:spPr>
+        <p:txBody>
+          <a:bodyPr/>
+          <a:p/>
+        </p:txBody>
       </p:sp>
       <p:sp>
         <p:nvSpPr>
@@ -4257,6 +4356,10 @@
             </a:outerShdw>
           </a:effectLst>
         </p:spPr>
+        <p:txBody>
+          <a:bodyPr/>
+          <a:p/>
+        </p:txBody>
       </p:sp>
       <p:sp>
         <p:nvSpPr>
@@ -4369,6 +4472,10 @@
             </a:outerShdw>
           </a:effectLst>
         </p:spPr>
+        <p:txBody>
+          <a:bodyPr/>
+          <a:p/>
+        </p:txBody>
       </p:sp>
       <p:sp>
         <p:nvSpPr>
@@ -4481,6 +4588,10 @@
             </a:outerShdw>
           </a:effectLst>
         </p:spPr>
+        <p:txBody>
+          <a:bodyPr/>
+          <a:p/>
+        </p:txBody>
       </p:sp>
       <p:sp>
         <p:nvSpPr>
@@ -4549,6 +4660,10 @@
             </a:outerShdw>
           </a:effectLst>
         </p:spPr>
+        <p:txBody>
+          <a:bodyPr/>
+          <a:p/>
+        </p:txBody>
       </p:sp>
       <p:sp>
         <p:nvSpPr>
@@ -4569,6 +4684,10 @@
           </a:solidFill>
           <a:ln/>
         </p:spPr>
+        <p:txBody>
+          <a:bodyPr/>
+          <a:p/>
+        </p:txBody>
       </p:sp>
       <p:sp>
         <p:nvSpPr>
@@ -4699,6 +4818,10 @@
             </a:outerShdw>
           </a:effectLst>
         </p:spPr>
+        <p:txBody>
+          <a:bodyPr/>
+          <a:p/>
+        </p:txBody>
       </p:sp>
       <p:sp>
         <p:nvSpPr>
@@ -4719,6 +4842,10 @@
           </a:solidFill>
           <a:ln/>
         </p:spPr>
+        <p:txBody>
+          <a:bodyPr/>
+          <a:p/>
+        </p:txBody>
       </p:sp>
       <p:sp>
         <p:nvSpPr>
@@ -4982,6 +5109,10 @@
           </a:solidFill>
           <a:ln/>
         </p:spPr>
+        <p:txBody>
+          <a:bodyPr/>
+          <a:p/>
+        </p:txBody>
       </p:sp>
       <p:sp>
         <p:nvSpPr>
@@ -5050,6 +5181,10 @@
             </a:outerShdw>
           </a:effectLst>
         </p:spPr>
+        <p:txBody>
+          <a:bodyPr/>
+          <a:p/>
+        </p:txBody>
       </p:sp>
       <p:sp>
         <p:nvSpPr>
@@ -5148,6 +5283,10 @@
           </a:solidFill>
           <a:ln/>
         </p:spPr>
+        <p:txBody>
+          <a:bodyPr/>
+          <a:p/>
+        </p:txBody>
       </p:sp>
       <p:sp>
         <p:nvSpPr>
@@ -5216,6 +5355,10 @@
             </a:outerShdw>
           </a:effectLst>
         </p:spPr>
+        <p:txBody>
+          <a:bodyPr/>
+          <a:p/>
+        </p:txBody>
       </p:sp>
       <p:sp>
         <p:nvSpPr>
@@ -5314,6 +5457,10 @@
           </a:solidFill>
           <a:ln/>
         </p:spPr>
+        <p:txBody>
+          <a:bodyPr/>
+          <a:p/>
+        </p:txBody>
       </p:sp>
       <p:sp>
         <p:nvSpPr>
@@ -5382,6 +5529,10 @@
             </a:outerShdw>
           </a:effectLst>
         </p:spPr>
+        <p:txBody>
+          <a:bodyPr/>
+          <a:p/>
+        </p:txBody>
       </p:sp>
       <p:sp>
         <p:nvSpPr>
@@ -5480,6 +5631,10 @@
           </a:solidFill>
           <a:ln/>
         </p:spPr>
+        <p:txBody>
+          <a:bodyPr/>
+          <a:p/>
+        </p:txBody>
       </p:sp>
       <p:sp>
         <p:nvSpPr>
@@ -5548,6 +5703,10 @@
             </a:outerShdw>
           </a:effectLst>
         </p:spPr>
+        <p:txBody>
+          <a:bodyPr/>
+          <a:p/>
+        </p:txBody>
       </p:sp>
       <p:sp>
         <p:nvSpPr>
@@ -5772,6 +5931,10 @@
             </a:outerShdw>
           </a:effectLst>
         </p:spPr>
+        <p:txBody>
+          <a:bodyPr/>
+          <a:p/>
+        </p:txBody>
       </p:sp>
       <p:sp>
         <p:nvSpPr>
@@ -5792,6 +5955,10 @@
           </a:solidFill>
           <a:ln/>
         </p:spPr>
+        <p:txBody>
+          <a:bodyPr/>
+          <a:p/>
+        </p:txBody>
       </p:sp>
       <p:sp>
         <p:nvSpPr>
@@ -5899,6 +6066,10 @@
             </a:outerShdw>
           </a:effectLst>
         </p:spPr>
+        <p:txBody>
+          <a:bodyPr/>
+          <a:p/>
+        </p:txBody>
       </p:sp>
       <p:sp>
         <p:nvSpPr>
@@ -5919,6 +6090,10 @@
           </a:solidFill>
           <a:ln/>
         </p:spPr>
+        <p:txBody>
+          <a:bodyPr/>
+          <a:p/>
+        </p:txBody>
       </p:sp>
       <p:sp>
         <p:nvSpPr>
@@ -6026,6 +6201,10 @@
             </a:outerShdw>
           </a:effectLst>
         </p:spPr>
+        <p:txBody>
+          <a:bodyPr/>
+          <a:p/>
+        </p:txBody>
       </p:sp>
       <p:sp>
         <p:nvSpPr>
@@ -6046,6 +6225,10 @@
           </a:solidFill>
           <a:ln/>
         </p:spPr>
+        <p:txBody>
+          <a:bodyPr/>
+          <a:p/>
+        </p:txBody>
       </p:sp>
       <p:sp>
         <p:nvSpPr>
@@ -6270,6 +6453,8 @@
               </a:rPr>
               <a:t>Kleine landen handelen relatief meer (% van bbp)</a:t>
             </a:r>
+          </a:p>
+          <a:p>
             <a:pPr algn="l" marL="342900" indent="-342900">
               <a:lnSpc>
                 <a:spcPct val="160000"/>
@@ -6291,6 +6476,8 @@
               </a:rPr>
               <a:t>Vijf factoren: ligging, achterland, infrastructuur, handelsblok, combinatie</a:t>
             </a:r>
+          </a:p>
+          <a:p>
             <a:pPr algn="l" marL="342900" indent="-342900">
               <a:lnSpc>
                 <a:spcPct val="160000"/>
@@ -6312,6 +6499,8 @@
               </a:rPr>
               <a:t>Havenomzet ≠ vrachtwaarde</a:t>
             </a:r>
+          </a:p>
+          <a:p>
             <a:pPr algn="l" marL="342900" indent="-342900">
               <a:lnSpc>
                 <a:spcPct val="160000"/>
@@ -6333,6 +6522,8 @@
               </a:rPr>
               <a:t>Arbeidsmigratie: aanbod ↑, loon ↓, werkgelegenheid ↑</a:t>
             </a:r>
+          </a:p>
+          <a:p>
             <a:pPr algn="l" marL="342900" indent="-342900">
               <a:lnSpc>
                 <a:spcPct val="160000"/>
@@ -6354,7 +6545,6 @@
               </a:rPr>
               <a:t>Graviteitsvergelijking: afstand, omvang, blok, cultuur</a:t>
             </a:r>
-            <a:endParaRPr lang="en-US" sz="1500" dirty="0"/>
           </a:p>
         </p:txBody>
       </p:sp>
